--- a/slides/ch13-job-search-and-resumes.pptx
+++ b/slides/ch13-job-search-and-resumes.pptx
@@ -7544,7 +7544,7 @@
                 </a:solidFill>
                 <a:latin typeface="Calibri"/>
               </a:rPr>
-              <a:t>'Dr. Reyes suggested I reach out' or 'Fellow Bison in med devices' — the warm element goes first.</a:t>
+              <a:t>'Dr. Reyes suggested I reach out' or 'Fellow alum working in med devices' — the warm element goes first.</a:t>
             </a:r>
           </a:p>
           <a:p>
@@ -7831,7 +7831,7 @@
                 </a:solidFill>
                 <a:latin typeface="Calibri"/>
               </a:rPr>
-              <a:t>the article that fits their project, the intro they'd want, congratulations on the promotion (Chapter 6's five-S notes).</a:t>
+              <a:t>the article that fits their project, the intro they'd want, congratulations on the promotion (Chapter 6's five-quality notes).</a:t>
             </a:r>
           </a:p>
           <a:p>

--- a/slides/ch13-job-search-and-resumes.pptx
+++ b/slides/ch13-job-search-and-resumes.pptx
@@ -6878,7 +6878,7 @@
                 </a:solidFill>
                 <a:latin typeface="Calibri"/>
               </a:rPr>
-              <a:t>BADM 225 · Chapter 13</a:t>
+              <a:t>BADM 225 · Chapter 13  ·  © Derek D. Bussan</a:t>
             </a:r>
           </a:p>
         </p:txBody>
@@ -7165,7 +7165,7 @@
                 </a:solidFill>
                 <a:latin typeface="Calibri"/>
               </a:rPr>
-              <a:t>BADM 225 · Chapter 13</a:t>
+              <a:t>BADM 225 · Chapter 13  ·  © Derek D. Bussan</a:t>
             </a:r>
           </a:p>
         </p:txBody>
@@ -7452,7 +7452,7 @@
                 </a:solidFill>
                 <a:latin typeface="Calibri"/>
               </a:rPr>
-              <a:t>BADM 225 · Chapter 13</a:t>
+              <a:t>BADM 225 · Chapter 13  ·  © Derek D. Bussan</a:t>
             </a:r>
           </a:p>
         </p:txBody>
@@ -7739,7 +7739,7 @@
                 </a:solidFill>
                 <a:latin typeface="Calibri"/>
               </a:rPr>
-              <a:t>BADM 225 · Chapter 13</a:t>
+              <a:t>BADM 225 · Chapter 13  ·  © Derek D. Bussan</a:t>
             </a:r>
           </a:p>
         </p:txBody>
@@ -8104,7 +8104,7 @@
                 </a:solidFill>
                 <a:latin typeface="Calibri"/>
               </a:rPr>
-              <a:t>BADM 225 · Chapter 13</a:t>
+              <a:t>BADM 225 · Chapter 13  ·  © Derek D. Bussan</a:t>
             </a:r>
           </a:p>
         </p:txBody>
@@ -8232,7 +8232,7 @@
                 </a:solidFill>
                 <a:latin typeface="Calibri"/>
               </a:rPr>
-              <a:t>BADM 225 · Chapter 13</a:t>
+              <a:t>BADM 225 · Chapter 13  ·  © Derek D. Bussan</a:t>
             </a:r>
           </a:p>
         </p:txBody>
@@ -8519,7 +8519,7 @@
                 </a:solidFill>
                 <a:latin typeface="Calibri"/>
               </a:rPr>
-              <a:t>BADM 225 · Chapter 13</a:t>
+              <a:t>BADM 225 · Chapter 13  ·  © Derek D. Bussan</a:t>
             </a:r>
           </a:p>
         </p:txBody>
@@ -8920,7 +8920,7 @@
                 </a:solidFill>
                 <a:latin typeface="Calibri"/>
               </a:rPr>
-              <a:t>BADM 225 · Chapter 13</a:t>
+              <a:t>BADM 225 · Chapter 13  ·  © Derek D. Bussan</a:t>
             </a:r>
           </a:p>
         </p:txBody>
@@ -9627,7 +9627,7 @@
                 </a:solidFill>
                 <a:latin typeface="Calibri"/>
               </a:rPr>
-              <a:t>BADM 225 · Chapter 13</a:t>
+              <a:t>BADM 225 · Chapter 13  ·  © Derek D. Bussan</a:t>
             </a:r>
           </a:p>
         </p:txBody>
@@ -9992,7 +9992,7 @@
                 </a:solidFill>
                 <a:latin typeface="Calibri"/>
               </a:rPr>
-              <a:t>BADM 225 · Chapter 13</a:t>
+              <a:t>BADM 225 · Chapter 13  ·  © Derek D. Bussan</a:t>
             </a:r>
           </a:p>
         </p:txBody>
@@ -10120,7 +10120,7 @@
                 </a:solidFill>
                 <a:latin typeface="Calibri"/>
               </a:rPr>
-              <a:t>BADM 225 · Chapter 13</a:t>
+              <a:t>BADM 225 · Chapter 13  ·  © Derek D. Bussan</a:t>
             </a:r>
           </a:p>
         </p:txBody>
@@ -10475,7 +10475,7 @@
                 </a:solidFill>
                 <a:latin typeface="Calibri"/>
               </a:rPr>
-              <a:t>BADM 225 · Chapter 13</a:t>
+              <a:t>BADM 225 · Chapter 13  ·  © Derek D. Bussan</a:t>
             </a:r>
           </a:p>
         </p:txBody>
@@ -10945,7 +10945,7 @@
                 </a:solidFill>
                 <a:latin typeface="Calibri"/>
               </a:rPr>
-              <a:t>BADM 225 · Chapter 13</a:t>
+              <a:t>BADM 225 · Chapter 13  ·  © Derek D. Bussan</a:t>
             </a:r>
           </a:p>
         </p:txBody>
@@ -11387,7 +11387,7 @@
                 </a:solidFill>
                 <a:latin typeface="Calibri"/>
               </a:rPr>
-              <a:t>BADM 225 · Chapter 13</a:t>
+              <a:t>BADM 225 · Chapter 13  ·  © Derek D. Bussan</a:t>
             </a:r>
           </a:p>
         </p:txBody>
@@ -11674,7 +11674,7 @@
                 </a:solidFill>
                 <a:latin typeface="Calibri"/>
               </a:rPr>
-              <a:t>BADM 225 · Chapter 13</a:t>
+              <a:t>BADM 225 · Chapter 13  ·  © Derek D. Bussan</a:t>
             </a:r>
           </a:p>
         </p:txBody>
@@ -11961,7 +11961,7 @@
                 </a:solidFill>
                 <a:latin typeface="Calibri"/>
               </a:rPr>
-              <a:t>BADM 225 · Chapter 13</a:t>
+              <a:t>BADM 225 · Chapter 13  ·  © Derek D. Bussan</a:t>
             </a:r>
           </a:p>
         </p:txBody>
@@ -12326,7 +12326,7 @@
                 </a:solidFill>
                 <a:latin typeface="Calibri"/>
               </a:rPr>
-              <a:t>BADM 225 · Chapter 13</a:t>
+              <a:t>BADM 225 · Chapter 13  ·  © Derek D. Bussan</a:t>
             </a:r>
           </a:p>
         </p:txBody>
@@ -12454,7 +12454,7 @@
                 </a:solidFill>
                 <a:latin typeface="Calibri"/>
               </a:rPr>
-              <a:t>BADM 225 · Chapter 13</a:t>
+              <a:t>BADM 225 · Chapter 13  ·  © Derek D. Bussan</a:t>
             </a:r>
           </a:p>
         </p:txBody>
@@ -12741,7 +12741,7 @@
                 </a:solidFill>
                 <a:latin typeface="Calibri"/>
               </a:rPr>
-              <a:t>BADM 225 · Chapter 13</a:t>
+              <a:t>BADM 225 · Chapter 13  ·  © Derek D. Bussan</a:t>
             </a:r>
           </a:p>
         </p:txBody>
@@ -13028,7 +13028,7 @@
                 </a:solidFill>
                 <a:latin typeface="Calibri"/>
               </a:rPr>
-              <a:t>BADM 225 · Chapter 13</a:t>
+              <a:t>BADM 225 · Chapter 13  ·  © Derek D. Bussan</a:t>
             </a:r>
           </a:p>
         </p:txBody>
@@ -13315,7 +13315,7 @@
                 </a:solidFill>
                 <a:latin typeface="Calibri"/>
               </a:rPr>
-              <a:t>BADM 225 · Chapter 13</a:t>
+              <a:t>BADM 225 · Chapter 13  ·  © Derek D. Bussan</a:t>
             </a:r>
           </a:p>
         </p:txBody>
@@ -13602,7 +13602,7 @@
                 </a:solidFill>
                 <a:latin typeface="Calibri"/>
               </a:rPr>
-              <a:t>BADM 225 · Chapter 13</a:t>
+              <a:t>BADM 225 · Chapter 13  ·  © Derek D. Bussan</a:t>
             </a:r>
           </a:p>
         </p:txBody>
@@ -14006,7 +14006,7 @@
                 </a:solidFill>
                 <a:latin typeface="Calibri"/>
               </a:rPr>
-              <a:t>BADM 225 · Chapter 13</a:t>
+              <a:t>BADM 225 · Chapter 13  ·  © Derek D. Bussan</a:t>
             </a:r>
           </a:p>
         </p:txBody>
@@ -14134,7 +14134,7 @@
                 </a:solidFill>
                 <a:latin typeface="Calibri"/>
               </a:rPr>
-              <a:t>BADM 225 · Chapter 13</a:t>
+              <a:t>BADM 225 · Chapter 13  ·  © Derek D. Bussan</a:t>
             </a:r>
           </a:p>
         </p:txBody>
@@ -14696,7 +14696,7 @@
                 </a:solidFill>
                 <a:latin typeface="Calibri"/>
               </a:rPr>
-              <a:t>BADM 225 · Chapter 13</a:t>
+              <a:t>BADM 225 · Chapter 13  ·  © Derek D. Bussan</a:t>
             </a:r>
           </a:p>
         </p:txBody>
@@ -14983,7 +14983,7 @@
                 </a:solidFill>
                 <a:latin typeface="Calibri"/>
               </a:rPr>
-              <a:t>BADM 225 · Chapter 13</a:t>
+              <a:t>BADM 225 · Chapter 13  ·  © Derek D. Bussan</a:t>
             </a:r>
           </a:p>
         </p:txBody>
@@ -15453,7 +15453,7 @@
                 </a:solidFill>
                 <a:latin typeface="Calibri"/>
               </a:rPr>
-              <a:t>BADM 225 · Chapter 13</a:t>
+              <a:t>BADM 225 · Chapter 13  ·  © Derek D. Bussan</a:t>
             </a:r>
           </a:p>
         </p:txBody>
@@ -15581,7 +15581,7 @@
                 </a:solidFill>
                 <a:latin typeface="Calibri"/>
               </a:rPr>
-              <a:t>BADM 225 · Chapter 13</a:t>
+              <a:t>BADM 225 · Chapter 13  ·  © Derek D. Bussan</a:t>
             </a:r>
           </a:p>
         </p:txBody>
@@ -15868,7 +15868,7 @@
                 </a:solidFill>
                 <a:latin typeface="Calibri"/>
               </a:rPr>
-              <a:t>BADM 225 · Chapter 13</a:t>
+              <a:t>BADM 225 · Chapter 13  ·  © Derek D. Bussan</a:t>
             </a:r>
           </a:p>
         </p:txBody>
@@ -16155,7 +16155,7 @@
                 </a:solidFill>
                 <a:latin typeface="Calibri"/>
               </a:rPr>
-              <a:t>BADM 225 · Chapter 13</a:t>
+              <a:t>BADM 225 · Chapter 13  ·  © Derek D. Bussan</a:t>
             </a:r>
           </a:p>
         </p:txBody>
@@ -16520,7 +16520,7 @@
                 </a:solidFill>
                 <a:latin typeface="Calibri"/>
               </a:rPr>
-              <a:t>BADM 225 · Chapter 13</a:t>
+              <a:t>BADM 225 · Chapter 13  ·  © Derek D. Bussan</a:t>
             </a:r>
           </a:p>
         </p:txBody>
@@ -16648,7 +16648,7 @@
                 </a:solidFill>
                 <a:latin typeface="Calibri"/>
               </a:rPr>
-              <a:t>BADM 225 · Chapter 13</a:t>
+              <a:t>BADM 225 · Chapter 13  ·  © Derek D. Bussan</a:t>
             </a:r>
           </a:p>
         </p:txBody>
@@ -17013,7 +17013,7 @@
                 </a:solidFill>
                 <a:latin typeface="Calibri"/>
               </a:rPr>
-              <a:t>BADM 225 · Chapter 13</a:t>
+              <a:t>BADM 225 · Chapter 13  ·  © Derek D. Bussan</a:t>
             </a:r>
           </a:p>
         </p:txBody>
@@ -17141,7 +17141,7 @@
                 </a:solidFill>
                 <a:latin typeface="Calibri"/>
               </a:rPr>
-              <a:t>BADM 225 · Chapter 13</a:t>
+              <a:t>BADM 225 · Chapter 13  ·  © Derek D. Bussan</a:t>
             </a:r>
           </a:p>
         </p:txBody>
@@ -17428,7 +17428,7 @@
                 </a:solidFill>
                 <a:latin typeface="Calibri"/>
               </a:rPr>
-              <a:t>BADM 225 · Chapter 13</a:t>
+              <a:t>BADM 225 · Chapter 13  ·  © Derek D. Bussan</a:t>
             </a:r>
           </a:p>
         </p:txBody>
@@ -17715,7 +17715,7 @@
                 </a:solidFill>
                 <a:latin typeface="Calibri"/>
               </a:rPr>
-              <a:t>BADM 225 · Chapter 13</a:t>
+              <a:t>BADM 225 · Chapter 13  ·  © Derek D. Bussan</a:t>
             </a:r>
           </a:p>
         </p:txBody>
@@ -18530,7 +18530,7 @@
                 </a:solidFill>
                 <a:latin typeface="Calibri"/>
               </a:rPr>
-              <a:t>BADM 225 · Chapter 13</a:t>
+              <a:t>BADM 225 · Chapter 13  ·  © Derek D. Bussan</a:t>
             </a:r>
           </a:p>
         </p:txBody>
@@ -18806,7 +18806,7 @@
                 </a:solidFill>
                 <a:latin typeface="Calibri"/>
               </a:rPr>
-              <a:t>BADM 225 · Chapter 13</a:t>
+              <a:t>BADM 225 · Chapter 13  ·  © Derek D. Bussan</a:t>
             </a:r>
           </a:p>
         </p:txBody>
@@ -18899,7 +18899,7 @@
                 </a:solidFill>
                 <a:latin typeface="Calibri"/>
               </a:rPr>
-              <a:t>BADM 225 · Chapter 13</a:t>
+              <a:t>BADM 225 · Chapter 13  ·  © Derek D. Bussan</a:t>
             </a:r>
           </a:p>
         </p:txBody>
@@ -19220,7 +19220,7 @@
                 </a:solidFill>
                 <a:latin typeface="Calibri"/>
               </a:rPr>
-              <a:t>BADM 225 · Chapter 13</a:t>
+              <a:t>BADM 225 · Chapter 13  ·  © Derek D. Bussan</a:t>
             </a:r>
           </a:p>
         </p:txBody>
@@ -19662,7 +19662,7 @@
                 </a:solidFill>
                 <a:latin typeface="Calibri"/>
               </a:rPr>
-              <a:t>BADM 225 · Chapter 13</a:t>
+              <a:t>BADM 225 · Chapter 13  ·  © Derek D. Bussan</a:t>
             </a:r>
           </a:p>
         </p:txBody>
@@ -19949,7 +19949,7 @@
                 </a:solidFill>
                 <a:latin typeface="Calibri"/>
               </a:rPr>
-              <a:t>BADM 225 · Chapter 13</a:t>
+              <a:t>BADM 225 · Chapter 13  ·  © Derek D. Bussan</a:t>
             </a:r>
           </a:p>
         </p:txBody>
@@ -20236,7 +20236,7 @@
                 </a:solidFill>
                 <a:latin typeface="Calibri"/>
               </a:rPr>
-              <a:t>BADM 225 · Chapter 13</a:t>
+              <a:t>BADM 225 · Chapter 13  ·  © Derek D. Bussan</a:t>
             </a:r>
           </a:p>
         </p:txBody>
@@ -20601,7 +20601,7 @@
                 </a:solidFill>
                 <a:latin typeface="Calibri"/>
               </a:rPr>
-              <a:t>BADM 225 · Chapter 13</a:t>
+              <a:t>BADM 225 · Chapter 13  ·  © Derek D. Bussan</a:t>
             </a:r>
           </a:p>
         </p:txBody>

--- a/slides/ch13-job-search-and-resumes.pptx
+++ b/slides/ch13-job-search-and-resumes.pptx
@@ -6785,7 +6785,7 @@
                 </a:solidFill>
                 <a:latin typeface="Calibri"/>
               </a:rPr>
-              <a:t>BADM 225 · Chapter 13  ·  Original instructional material — no publisher content</a:t>
+              <a:t>BADM 225 · Chapter 13  ·  Original material © 2026 Derek D. Bussan, PhD, MBA  ·  No publisher content</a:t>
             </a:r>
           </a:p>
         </p:txBody>
